--- a/og/layouts/spectrometer hardware/parts and part list.pptx
+++ b/og/layouts/spectrometer hardware/parts and part list.pptx
@@ -2221,7 +2221,7 @@
           <a:p>
             <a:r>
               <a:rPr lang="en-US" sz="1200" dirty="0"/>
-              <a:t>A professionally-built setup with NEMA-17 1.5Amp stepper motor (</a:t>
+              <a:t>Our home-modified setup with NEMA-17 1.5Amp stepper motor (</a:t>
             </a:r>
             <a:r>
               <a:rPr lang="en-US" sz="1200" dirty="0" err="1"/>
@@ -2759,7 +2759,7 @@
             <p:ph idx="1"/>
             <p:extLst>
               <p:ext uri="{D42A27DB-BD31-4B8C-83A1-F6EECF244321}">
-                <p14:modId xmlns:p14="http://schemas.microsoft.com/office/powerpoint/2010/main" val="778988788"/>
+                <p14:modId xmlns:p14="http://schemas.microsoft.com/office/powerpoint/2010/main" val="3114671408"/>
               </p:ext>
             </p:extLst>
           </p:nvPr>
@@ -2851,7 +2851,7 @@
                     <a:p>
                       <a:r>
                         <a:rPr lang="en-US" sz="1000" dirty="0"/>
-                        <a:t>Stepper motor NEMA-17 2 amp</a:t>
+                        <a:t>Stepper motor NEMA-17 1.5 amp</a:t>
                       </a:r>
                     </a:p>
                   </a:txBody>
@@ -2862,6 +2862,10 @@
                     <a:bodyPr/>
                     <a:lstStyle/>
                     <a:p>
+                      <a:r>
+                        <a:rPr lang="en-US" sz="1000" dirty="0"/>
+                        <a:t>17HS4401 / </a:t>
+                      </a:r>
                       <a:r>
                         <a:rPr lang="en-US" sz="1000" dirty="0" err="1"/>
                         <a:t>Twotrees</a:t>
@@ -2879,7 +2883,10 @@
                     <a:bodyPr/>
                     <a:lstStyle/>
                     <a:p>
-                      <a:endParaRPr lang="en-US" sz="1000"/>
+                      <a:r>
+                        <a:rPr lang="en-US" sz="1000" dirty="0"/>
+                        <a:t>No longer available from this vendor, but part# is standard</a:t>
+                      </a:r>
                     </a:p>
                   </a:txBody>
                   <a:tcPr/>
@@ -4216,21 +4223,6 @@
 </file>
 
 <file path=customXml/item1.xml><?xml version="1.0" encoding="utf-8"?>
-<p:properties xmlns:p="http://schemas.microsoft.com/office/2006/metadata/properties" xmlns:xsi="http://www.w3.org/2001/XMLSchema-instance" xmlns:pc="http://schemas.microsoft.com/office/infopath/2007/PartnerControls">
-  <documentManagement/>
-</p:properties>
-</file>
-
-<file path=customXml/item2.xml><?xml version="1.0" encoding="utf-8"?>
-<?mso-contentType ?>
-<FormTemplates xmlns="http://schemas.microsoft.com/sharepoint/v3/contenttype/forms">
-  <Display>DocumentLibraryForm</Display>
-  <Edit>DocumentLibraryForm</Edit>
-  <New>DocumentLibraryForm</New>
-</FormTemplates>
-</file>
-
-<file path=customXml/item3.xml><?xml version="1.0" encoding="utf-8"?>
 <ct:contentTypeSchema xmlns:ct="http://schemas.microsoft.com/office/2006/metadata/contentType" xmlns:ma="http://schemas.microsoft.com/office/2006/metadata/properties/metaAttributes" ct:_="" ma:_="" ma:contentTypeName="Document" ma:contentTypeID="0x010100AEECEE844703BA4190C49DA8BC829728" ma:contentTypeVersion="4" ma:contentTypeDescription="Create a new document." ma:contentTypeScope="" ma:versionID="da633761d8a18fa779bcda5bc79afac4">
   <xsd:schema xmlns:xsd="http://www.w3.org/2001/XMLSchema" xmlns:xs="http://www.w3.org/2001/XMLSchema" xmlns:p="http://schemas.microsoft.com/office/2006/metadata/properties" xmlns:ns3="2bd4e6e1-2c8d-49cd-9bbc-672eee709708" targetNamespace="http://schemas.microsoft.com/office/2006/metadata/properties" ma:root="true" ma:fieldsID="536f4b1386eee13875ad531dd634fe92" ns3:_="">
     <xsd:import namespace="2bd4e6e1-2c8d-49cd-9bbc-672eee709708"/>
@@ -4376,31 +4368,22 @@
 </ct:contentTypeSchema>
 </file>
 
-<file path=customXml/itemProps1.xml><?xml version="1.0" encoding="utf-8"?>
-<ds:datastoreItem xmlns:ds="http://schemas.openxmlformats.org/officeDocument/2006/customXml" ds:itemID="{70DF747F-86F1-4A20-AE37-438D55E3287B}">
-  <ds:schemaRefs>
-    <ds:schemaRef ds:uri="http://purl.org/dc/elements/1.1/"/>
-    <ds:schemaRef ds:uri="http://schemas.microsoft.com/office/2006/metadata/properties"/>
-    <ds:schemaRef ds:uri="http://purl.org/dc/terms/"/>
-    <ds:schemaRef ds:uri="http://schemas.openxmlformats.org/package/2006/metadata/core-properties"/>
-    <ds:schemaRef ds:uri="2bd4e6e1-2c8d-49cd-9bbc-672eee709708"/>
-    <ds:schemaRef ds:uri="http://schemas.microsoft.com/office/2006/documentManagement/types"/>
-    <ds:schemaRef ds:uri="http://schemas.microsoft.com/office/infopath/2007/PartnerControls"/>
-    <ds:schemaRef ds:uri="http://www.w3.org/XML/1998/namespace"/>
-    <ds:schemaRef ds:uri="http://purl.org/dc/dcmitype/"/>
-  </ds:schemaRefs>
-</ds:datastoreItem>
+<file path=customXml/item2.xml><?xml version="1.0" encoding="utf-8"?>
+<?mso-contentType ?>
+<FormTemplates xmlns="http://schemas.microsoft.com/sharepoint/v3/contenttype/forms">
+  <Display>DocumentLibraryForm</Display>
+  <Edit>DocumentLibraryForm</Edit>
+  <New>DocumentLibraryForm</New>
+</FormTemplates>
 </file>
 
-<file path=customXml/itemProps2.xml><?xml version="1.0" encoding="utf-8"?>
-<ds:datastoreItem xmlns:ds="http://schemas.openxmlformats.org/officeDocument/2006/customXml" ds:itemID="{D20E565E-B67D-4279-ADB5-47ED6CE6BF60}">
-  <ds:schemaRefs>
-    <ds:schemaRef ds:uri="http://schemas.microsoft.com/sharepoint/v3/contenttype/forms"/>
-  </ds:schemaRefs>
-</ds:datastoreItem>
+<file path=customXml/item3.xml><?xml version="1.0" encoding="utf-8"?>
+<p:properties xmlns:p="http://schemas.microsoft.com/office/2006/metadata/properties" xmlns:xsi="http://www.w3.org/2001/XMLSchema-instance" xmlns:pc="http://schemas.microsoft.com/office/infopath/2007/PartnerControls">
+  <documentManagement/>
+</p:properties>
 </file>
 
-<file path=customXml/itemProps3.xml><?xml version="1.0" encoding="utf-8"?>
+<file path=customXml/itemProps1.xml><?xml version="1.0" encoding="utf-8"?>
 <ds:datastoreItem xmlns:ds="http://schemas.openxmlformats.org/officeDocument/2006/customXml" ds:itemID="{341B2891-B75C-4240-B385-255435C39FC2}">
   <ds:schemaRefs>
     <ds:schemaRef ds:uri="http://schemas.microsoft.com/office/2006/metadata/contentType"/>
@@ -4416,4 +4399,28 @@
     <ds:schemaRef ds:uri="http://schemas.microsoft.com/internal/obd"/>
   </ds:schemaRefs>
 </ds:datastoreItem>
+</file>
+
+<file path=customXml/itemProps2.xml><?xml version="1.0" encoding="utf-8"?>
+<ds:datastoreItem xmlns:ds="http://schemas.openxmlformats.org/officeDocument/2006/customXml" ds:itemID="{D20E565E-B67D-4279-ADB5-47ED6CE6BF60}">
+  <ds:schemaRefs>
+    <ds:schemaRef ds:uri="http://schemas.microsoft.com/sharepoint/v3/contenttype/forms"/>
+  </ds:schemaRefs>
+</ds:datastoreItem>
+</file>
+
+<file path=customXml/itemProps3.xml><?xml version="1.0" encoding="utf-8"?>
+<ds:datastoreItem xmlns:ds="http://schemas.openxmlformats.org/officeDocument/2006/customXml" ds:itemID="{70DF747F-86F1-4A20-AE37-438D55E3287B}">
+  <ds:schemaRefs>
+    <ds:schemaRef ds:uri="http://purl.org/dc/elements/1.1/"/>
+    <ds:schemaRef ds:uri="http://schemas.microsoft.com/office/2006/metadata/properties"/>
+    <ds:schemaRef ds:uri="http://purl.org/dc/terms/"/>
+    <ds:schemaRef ds:uri="http://schemas.openxmlformats.org/package/2006/metadata/core-properties"/>
+    <ds:schemaRef ds:uri="2bd4e6e1-2c8d-49cd-9bbc-672eee709708"/>
+    <ds:schemaRef ds:uri="http://schemas.microsoft.com/office/2006/documentManagement/types"/>
+    <ds:schemaRef ds:uri="http://schemas.microsoft.com/office/infopath/2007/PartnerControls"/>
+    <ds:schemaRef ds:uri="http://www.w3.org/XML/1998/namespace"/>
+    <ds:schemaRef ds:uri="http://purl.org/dc/dcmitype/"/>
+  </ds:schemaRefs>
+</ds:datastoreItem>
 </file>